--- a/builder/assets/reference-pages/correlation-matrix.pptx
+++ b/builder/assets/reference-pages/correlation-matrix.pptx
@@ -1099,7 +1099,7 @@
                   <a:srgbClr val="15375F"/>
                 </a:solidFill>
               </a:rPr>
-              <a:t>客户触达与转化率同向最强，响应时长与转化率反向最强</a:t>
+              <a:t>Customer reach and conversion rate are in the same direction, while response time and conversion rate are in the opposite direction.</a:t>
             </a:r>
           </a:p>
         </p:txBody>
@@ -1151,7 +1151,7 @@
                   <a:srgbClr val="697386"/>
                 </a:solidFill>
               </a:rPr>
-              <a:t>合成示例数据，非真实客户数据</a:t>
+              <a:t>Synthetic sample data, not real customer data</a:t>
             </a:r>
           </a:p>
         </p:txBody>
@@ -1236,7 +1236,7 @@
                   <a:srgbClr val="15375F"/>
                 </a:solidFill>
               </a:rPr>
-              <a:t>Pearson 系数</a:t>
+              <a:t>Pearson coefficient</a:t>
             </a:r>
           </a:p>
         </p:txBody>
@@ -1288,7 +1288,7 @@
                   <a:srgbClr val="172033"/>
                 </a:solidFill>
               </a:rPr>
-              <a:t>客户触达</a:t>
+              <a:t>customer reach</a:t>
             </a:r>
           </a:p>
         </p:txBody>
@@ -1340,7 +1340,7 @@
                   <a:srgbClr val="172033"/>
                 </a:solidFill>
               </a:rPr>
-              <a:t>客户触达</a:t>
+              <a:t>customer reach</a:t>
             </a:r>
           </a:p>
         </p:txBody>
@@ -1392,7 +1392,7 @@
                   <a:srgbClr val="172033"/>
                 </a:solidFill>
               </a:rPr>
-              <a:t>转化率</a:t>
+              <a:t>conversion rate</a:t>
             </a:r>
           </a:p>
         </p:txBody>
@@ -1444,7 +1444,7 @@
                   <a:srgbClr val="172033"/>
                 </a:solidFill>
               </a:rPr>
-              <a:t>转化率</a:t>
+              <a:t>conversion rate</a:t>
             </a:r>
           </a:p>
         </p:txBody>
@@ -1496,7 +1496,7 @@
                   <a:srgbClr val="172033"/>
                 </a:solidFill>
               </a:rPr>
-              <a:t>响应时长</a:t>
+              <a:t>response time</a:t>
             </a:r>
           </a:p>
         </p:txBody>
@@ -1548,7 +1548,7 @@
                   <a:srgbClr val="172033"/>
                 </a:solidFill>
               </a:rPr>
-              <a:t>响应时长</a:t>
+              <a:t>response time</a:t>
             </a:r>
           </a:p>
         </p:txBody>
@@ -1600,7 +1600,7 @@
                   <a:srgbClr val="172033"/>
                 </a:solidFill>
               </a:rPr>
-              <a:t>复购率</a:t>
+              <a:t>Repurchase rate</a:t>
             </a:r>
           </a:p>
         </p:txBody>
@@ -1652,7 +1652,7 @@
                   <a:srgbClr val="172033"/>
                 </a:solidFill>
               </a:rPr>
-              <a:t>复购率</a:t>
+              <a:t>Repurchase rate</a:t>
             </a:r>
           </a:p>
         </p:txBody>
@@ -1704,7 +1704,7 @@
                   <a:srgbClr val="172033"/>
                 </a:solidFill>
               </a:rPr>
-              <a:t>客单价</a:t>
+              <a:t>Price per customer</a:t>
             </a:r>
           </a:p>
         </p:txBody>
@@ -1756,7 +1756,7 @@
                   <a:srgbClr val="172033"/>
                 </a:solidFill>
               </a:rPr>
-              <a:t>客单价</a:t>
+              <a:t>Price per customer</a:t>
             </a:r>
           </a:p>
         </p:txBody>
@@ -1808,7 +1808,7 @@
                   <a:srgbClr val="172033"/>
                 </a:solidFill>
               </a:rPr>
-              <a:t>退款率</a:t>
+              <a:t>Refund rate</a:t>
             </a:r>
           </a:p>
         </p:txBody>
@@ -1860,7 +1860,7 @@
                   <a:srgbClr val="172033"/>
                 </a:solidFill>
               </a:rPr>
-              <a:t>退款率</a:t>
+              <a:t>Refund rate</a:t>
             </a:r>
           </a:p>
         </p:txBody>
@@ -5005,7 +5005,7 @@
                   <a:srgbClr val="15375F"/>
                 </a:solidFill>
               </a:rPr>
-              <a:t>优先核查的变量关系</a:t>
+              <a:t>Variable relationships to check first</a:t>
             </a:r>
           </a:p>
         </p:txBody>
@@ -5057,7 +5057,7 @@
                   <a:srgbClr val="2F6FB2"/>
                 </a:solidFill>
               </a:rPr>
-              <a:t>最强正相关</a:t>
+              <a:t>Strongest positive correlation</a:t>
             </a:r>
           </a:p>
         </p:txBody>
@@ -5161,7 +5161,7 @@
                   <a:srgbClr val="172033"/>
                 </a:solidFill>
               </a:rPr>
-              <a:t>客户触达 × 转化率</a:t>
+              <a:t>customer reach × conversion rate</a:t>
             </a:r>
           </a:p>
         </p:txBody>
@@ -5213,7 +5213,7 @@
                   <a:srgbClr val="B84B35"/>
                 </a:solidFill>
               </a:rPr>
-              <a:t>最强负相关</a:t>
+              <a:t>Strongest negative correlation</a:t>
             </a:r>
           </a:p>
         </p:txBody>
@@ -5317,7 +5317,7 @@
                   <a:srgbClr val="172033"/>
                 </a:solidFill>
               </a:rPr>
-              <a:t>转化率 × 响应时长</a:t>
+              <a:t>conversion rate × response time</a:t>
             </a:r>
           </a:p>
         </p:txBody>
@@ -5369,7 +5369,7 @@
                   <a:srgbClr val="697386"/>
                 </a:solidFill>
               </a:rPr>
-              <a:t>最弱关系</a:t>
+              <a:t>weakest relationship</a:t>
             </a:r>
           </a:p>
         </p:txBody>
@@ -5473,7 +5473,7 @@
                   <a:srgbClr val="172033"/>
                 </a:solidFill>
               </a:rPr>
-              <a:t>客单价 × 退款率</a:t>
+              <a:t>Price per customer × Refund rate</a:t>
             </a:r>
           </a:p>
         </p:txBody>
@@ -5525,7 +5525,7 @@
                   <a:srgbClr val="697386"/>
                 </a:solidFill>
               </a:rPr>
-              <a:t>重点阈值：|r| ≥ 0.50；弱关系按 |r| 最小识别</a:t>
+              <a:t>Focus threshold:|r| ≥ 0.50;Weak relationship press |r| minimum recognition</a:t>
             </a:r>
           </a:p>
         </p:txBody>
@@ -5577,7 +5577,7 @@
                   <a:srgbClr val="15375F"/>
                 </a:solidFill>
               </a:rPr>
-              <a:t>优先复核客户触达、响应时长与转化率的共同驱动因素</a:t>
+              <a:t>Prioritize review of common drivers of customer reach, response time, and conversion rate</a:t>
             </a:r>
           </a:p>
         </p:txBody>
@@ -5629,7 +5629,7 @@
                   <a:srgbClr val="697386"/>
                 </a:solidFill>
               </a:rPr>
-              <a:t>2024年1月至2025年12月；匿名零售业务月度总体；n=24；缺失值：成对删除</a:t>
+              <a:t>2024year1solstice2025year12Month; Anonymous retail business monthly total;n=24;Missing values: delete in pairs</a:t>
             </a:r>
           </a:p>
         </p:txBody>
@@ -5681,7 +5681,7 @@
                   <a:srgbClr val="697386"/>
                 </a:solidFill>
               </a:rPr>
-              <a:t>内部匿名合成数据；相关不代表因果</a:t>
+              <a:t>Internally anonymous synthetic data; correlation does not imply causation</a:t>
             </a:r>
           </a:p>
         </p:txBody>
@@ -5733,7 +5733,7 @@
                   <a:srgbClr val="E8872D"/>
                 </a:solidFill>
               </a:rPr>
-              <a:t>合成示例数据，非真实客户数据</a:t>
+              <a:t>Synthetic sample data, not real customer data</a:t>
             </a:r>
           </a:p>
         </p:txBody>
